--- a/templates/closing/closing_with_photo_A.pptx
+++ b/templates/closing/closing_with_photo_A.pptx
@@ -3105,7 +3105,7 @@
         <p:spPr>
           <a:xfrm>
             <a:off x="0" y="0"/>
-            <a:ext cx="7560000" cy="6120000"/>
+            <a:ext cx="7560000" cy="6840000"/>
           </a:xfrm>
           <a:prstGeom prst="rect">
             <a:avLst/>
@@ -3148,8 +3148,8 @@
         </p:nvSpPr>
         <p:spPr>
           <a:xfrm>
-            <a:off x="0" y="6120000"/>
-            <a:ext cx="7560000" cy="4572000"/>
+            <a:off x="0" y="6840000"/>
+            <a:ext cx="7560000" cy="3852000"/>
           </a:xfrm>
           <a:prstGeom prst="rect">
             <a:avLst/>
@@ -3192,8 +3192,8 @@
         </p:nvSpPr>
         <p:spPr>
           <a:xfrm>
-            <a:off x="2592000" y="7614000"/>
-            <a:ext cx="2376000" cy="19050"/>
+            <a:off x="2952000" y="7830000"/>
+            <a:ext cx="1656000" cy="17780"/>
           </a:xfrm>
           <a:prstGeom prst="rect">
             <a:avLst/>
@@ -3236,8 +3236,8 @@
         </p:nvSpPr>
         <p:spPr>
           <a:xfrm>
-            <a:off x="432000" y="7902000"/>
-            <a:ext cx="6696000" cy="864000"/>
+            <a:off x="432000" y="8190000"/>
+            <a:ext cx="6696000" cy="720000"/>
           </a:xfrm>
           <a:prstGeom prst="rect">
             <a:avLst/>
@@ -3256,7 +3256,7 @@
               </a:lnSpc>
             </a:pPr>
             <a:r>
-              <a:rPr sz="1900" b="1">
+              <a:rPr sz="2000" b="1">
                 <a:solidFill>
                   <a:srgbClr val="FFFFFF"/>
                 </a:solidFill>
@@ -3275,7 +3275,7 @@
         </p:nvSpPr>
         <p:spPr>
           <a:xfrm>
-            <a:off x="432000" y="8766000"/>
+            <a:off x="432000" y="8946000"/>
             <a:ext cx="6696000" cy="324000"/>
           </a:xfrm>
           <a:prstGeom prst="rect">
@@ -3297,7 +3297,7 @@
             <a:r>
               <a:rPr sz="1200" b="0">
                 <a:solidFill>
-                  <a:srgbClr val="DCDEE4"/>
+                  <a:srgbClr val="CDD2DE"/>
                 </a:solidFill>
                 <a:latin typeface="맑은 고딕"/>
               </a:rPr>
@@ -3314,7 +3314,7 @@
         </p:nvSpPr>
         <p:spPr>
           <a:xfrm>
-            <a:off x="432000" y="9090000"/>
+            <a:off x="432000" y="9270000"/>
             <a:ext cx="6696000" cy="324000"/>
           </a:xfrm>
           <a:prstGeom prst="rect">
@@ -3336,7 +3336,7 @@
             <a:r>
               <a:rPr sz="1200" b="0">
                 <a:solidFill>
-                  <a:srgbClr val="DCDEE4"/>
+                  <a:srgbClr val="CDD2DE"/>
                 </a:solidFill>
                 <a:latin typeface="맑은 고딕"/>
               </a:rPr>
